--- a/powerpoints/3. 聽說 AI 很聰明？其實它是超厲害的「文字接龍高手」！.pptx
+++ b/powerpoints/3. 聽說 AI 很聰明？其實它是超厲害的「文字接龍高手」！.pptx
@@ -311,7 +311,7 @@
           <a:p>
             <a:fld id="{5BCAD085-E8A6-8845-BD4E-CB4CCA059FC4}" type="datetimeFigureOut">
               <a:rPr lang="en-US" smtClean="0"/>
-              <a:t>7/28/2026</a:t>
+              <a:t>7/30/2026</a:t>
             </a:fld>
             <a:endParaRPr lang="en-US"/>
           </a:p>
@@ -479,7 +479,7 @@
           <a:p>
             <a:fld id="{5BCAD085-E8A6-8845-BD4E-CB4CCA059FC4}" type="datetimeFigureOut">
               <a:rPr lang="en-US" smtClean="0"/>
-              <a:t>7/28/2026</a:t>
+              <a:t>7/30/2026</a:t>
             </a:fld>
             <a:endParaRPr lang="en-US"/>
           </a:p>
@@ -657,7 +657,7 @@
           <a:p>
             <a:fld id="{5BCAD085-E8A6-8845-BD4E-CB4CCA059FC4}" type="datetimeFigureOut">
               <a:rPr lang="en-US" smtClean="0"/>
-              <a:t>7/28/2026</a:t>
+              <a:t>7/30/2026</a:t>
             </a:fld>
             <a:endParaRPr lang="en-US"/>
           </a:p>
@@ -825,7 +825,7 @@
           <a:p>
             <a:fld id="{5BCAD085-E8A6-8845-BD4E-CB4CCA059FC4}" type="datetimeFigureOut">
               <a:rPr lang="en-US" smtClean="0"/>
-              <a:t>7/28/2026</a:t>
+              <a:t>7/30/2026</a:t>
             </a:fld>
             <a:endParaRPr lang="en-US"/>
           </a:p>
@@ -1070,7 +1070,7 @@
           <a:p>
             <a:fld id="{5BCAD085-E8A6-8845-BD4E-CB4CCA059FC4}" type="datetimeFigureOut">
               <a:rPr lang="en-US" smtClean="0"/>
-              <a:t>7/28/2026</a:t>
+              <a:t>7/30/2026</a:t>
             </a:fld>
             <a:endParaRPr lang="en-US"/>
           </a:p>
@@ -1355,7 +1355,7 @@
           <a:p>
             <a:fld id="{5BCAD085-E8A6-8845-BD4E-CB4CCA059FC4}" type="datetimeFigureOut">
               <a:rPr lang="en-US" smtClean="0"/>
-              <a:t>7/28/2026</a:t>
+              <a:t>7/30/2026</a:t>
             </a:fld>
             <a:endParaRPr lang="en-US"/>
           </a:p>
@@ -1774,7 +1774,7 @@
           <a:p>
             <a:fld id="{5BCAD085-E8A6-8845-BD4E-CB4CCA059FC4}" type="datetimeFigureOut">
               <a:rPr lang="en-US" smtClean="0"/>
-              <a:t>7/28/2026</a:t>
+              <a:t>7/30/2026</a:t>
             </a:fld>
             <a:endParaRPr lang="en-US"/>
           </a:p>
@@ -1891,7 +1891,7 @@
           <a:p>
             <a:fld id="{5BCAD085-E8A6-8845-BD4E-CB4CCA059FC4}" type="datetimeFigureOut">
               <a:rPr lang="en-US" smtClean="0"/>
-              <a:t>7/28/2026</a:t>
+              <a:t>7/30/2026</a:t>
             </a:fld>
             <a:endParaRPr lang="en-US"/>
           </a:p>
@@ -1986,7 +1986,7 @@
           <a:p>
             <a:fld id="{5BCAD085-E8A6-8845-BD4E-CB4CCA059FC4}" type="datetimeFigureOut">
               <a:rPr lang="en-US" smtClean="0"/>
-              <a:t>7/28/2026</a:t>
+              <a:t>7/30/2026</a:t>
             </a:fld>
             <a:endParaRPr lang="en-US"/>
           </a:p>
@@ -2261,7 +2261,7 @@
           <a:p>
             <a:fld id="{5BCAD085-E8A6-8845-BD4E-CB4CCA059FC4}" type="datetimeFigureOut">
               <a:rPr lang="en-US" smtClean="0"/>
-              <a:t>7/28/2026</a:t>
+              <a:t>7/30/2026</a:t>
             </a:fld>
             <a:endParaRPr lang="en-US"/>
           </a:p>
@@ -2513,7 +2513,7 @@
           <a:p>
             <a:fld id="{5BCAD085-E8A6-8845-BD4E-CB4CCA059FC4}" type="datetimeFigureOut">
               <a:rPr lang="en-US" smtClean="0"/>
-              <a:t>7/28/2026</a:t>
+              <a:t>7/30/2026</a:t>
             </a:fld>
             <a:endParaRPr lang="en-US"/>
           </a:p>
@@ -2724,7 +2724,7 @@
           <a:p>
             <a:fld id="{5BCAD085-E8A6-8845-BD4E-CB4CCA059FC4}" type="datetimeFigureOut">
               <a:rPr lang="en-US" smtClean="0"/>
-              <a:t>7/28/2026</a:t>
+              <a:t>7/30/2026</a:t>
             </a:fld>
             <a:endParaRPr lang="en-US"/>
           </a:p>
@@ -4655,26 +4655,54 @@
               </a:lnSpc>
             </a:pPr>
             <a:r>
-              <a:rPr sz="1425" b="1" i="0" u="none">
+              <a:rPr sz="1425" b="1" i="0" u="none" dirty="0" err="1">
                 <a:solidFill>
                   <a:srgbClr val="334155"/>
                 </a:solidFill>
                 <a:latin typeface="Noto Sans TC"/>
               </a:rPr>
-              <a:t>語意星空地圖 (Semantic Map)</a:t>
-            </a:r>
-            <a:r>
+              <a:t>語意星空地圖</a:t>
+            </a:r>
+            <a:r>
+              <a:rPr sz="1425" b="1" i="0" u="none" dirty="0">
+                <a:solidFill>
+                  <a:srgbClr val="334155"/>
+                </a:solidFill>
+                <a:latin typeface="Noto Sans TC"/>
+              </a:rPr>
+              <a:t> (Semantic Map)</a:t>
+            </a:r>
+            <a:r>
+              <a:rPr dirty="0"/>
               <a:t>
 </a:t>
             </a:r>
             <a:r>
-              <a:rPr sz="1425" b="0" i="0" u="none">
+              <a:rPr sz="1425" b="0" i="0" u="none" dirty="0">
                 <a:solidFill>
                   <a:srgbClr val="334155"/>
                 </a:solidFill>
                 <a:latin typeface="Noto Sans TC"/>
               </a:rPr>
-              <a:t> 在維度空間中，意思相近的字詞（如：貓與狗）距離會住得非常近！</a:t>
+              <a:t> </a:t>
+            </a:r>
+            <a:r>
+              <a:rPr sz="1425" b="0" i="0" u="none" dirty="0" err="1">
+                <a:solidFill>
+                  <a:srgbClr val="334155"/>
+                </a:solidFill>
+                <a:latin typeface="Noto Sans TC"/>
+              </a:rPr>
+              <a:t>在維度空間中，意思相近的字詞（如：貓與狗）距離會住得非常近</a:t>
+            </a:r>
+            <a:r>
+              <a:rPr sz="1425" b="0" i="0" u="none" dirty="0">
+                <a:solidFill>
+                  <a:srgbClr val="334155"/>
+                </a:solidFill>
+                <a:latin typeface="Noto Sans TC"/>
+              </a:rPr>
+              <a:t>！</a:t>
             </a:r>
           </a:p>
         </p:txBody>
@@ -5035,16 +5063,25 @@
               </a:lnSpc>
             </a:pPr>
             <a:r>
-              <a:rPr sz="1350" b="0" i="0" u="none">
+              <a:rPr sz="1350" b="0" i="0" u="none" dirty="0">
                 <a:solidFill>
                   <a:srgbClr val="334155"/>
                 </a:solidFill>
                 <a:latin typeface="Noto Sans TC"/>
               </a:rPr>
-              <a:t>AI 寫文章並非一次生成全文，而是一步一腳印、</a:t>
-            </a:r>
-            <a:r>
-              <a:rPr sz="1350" b="1" i="0" u="none">
+              <a:t>AI </a:t>
+            </a:r>
+            <a:r>
+              <a:rPr sz="1350" b="0" i="0" u="none" dirty="0" err="1">
+                <a:solidFill>
+                  <a:srgbClr val="334155"/>
+                </a:solidFill>
+                <a:latin typeface="Noto Sans TC"/>
+              </a:rPr>
+              <a:t>寫文章並非一次生成全文，而是一步一腳印、</a:t>
+            </a:r>
+            <a:r>
+              <a:rPr sz="1350" b="1" i="0" u="none" dirty="0" err="1">
                 <a:solidFill>
                   <a:srgbClr val="0284C7"/>
                 </a:solidFill>
@@ -5053,7 +5090,7 @@
               <a:t>一次只吐出一個字</a:t>
             </a:r>
             <a:r>
-              <a:rPr sz="1350" b="0" i="0" u="none">
+              <a:rPr sz="1350" b="0" i="0" u="none" dirty="0">
                 <a:solidFill>
                   <a:srgbClr val="334155"/>
                 </a:solidFill>
